--- a/docs/Career_Day_2026_EWMS.pptx
+++ b/docs/Career_Day_2026_EWMS.pptx
@@ -7370,7 +7370,7 @@
                 <a:ea typeface="Nunito Sans" pitchFamily="34" charset="-122"/>
                 <a:cs typeface="Nunito Sans" pitchFamily="34" charset="-120"/>
               </a:rPr>
-              <a:t>YOUR-CLOUD-RUN-URL.a.run.app</a:t>
+              <a:t>willkie-badger-ai-424903425639.us-central1.run.app</a:t>
             </a:r>
           </a:p>
         </p:txBody>
@@ -14104,7 +14104,7 @@
                 <a:ea typeface="Nunito Sans" pitchFamily="34" charset="-122"/>
                 <a:cs typeface="Nunito Sans" pitchFamily="34" charset="-120"/>
               </a:rPr>
-              <a:t>YOUR-CLOUD-RUN-URL.a.run.app</a:t>
+              <a:t>willkie-badger-ai-424903425639.us-central1.run.app</a:t>
             </a:r>
           </a:p>
         </p:txBody>

--- a/docs/Career_Day_2026_EWMS.pptx
+++ b/docs/Career_Day_2026_EWMS.pptx
@@ -9,20 +9,22 @@
   </p:notesMasterIdLst>
   <p:sldIdLst>
     <p:sldId id="256" r:id="rId2"/>
-    <p:sldId id="257" r:id="rId3"/>
+    <p:sldId id="274" r:id="rId26"/>
+    <p:sldId id="275" r:id="rId27"/>
     <p:sldId id="258" r:id="rId4"/>
     <p:sldId id="259" r:id="rId5"/>
     <p:sldId id="260" r:id="rId6"/>
+    <p:sldId id="265" r:id="rId11"/>
+    <p:sldId id="257" r:id="rId3"/>
     <p:sldId id="261" r:id="rId7"/>
     <p:sldId id="262" r:id="rId8"/>
     <p:sldId id="263" r:id="rId9"/>
+    <p:sldId id="266" r:id="rId12"/>
+    <p:sldId id="267" r:id="rId13"/>
+    <p:sldId id="269" r:id="rId15"/>
     <p:sldId id="264" r:id="rId10"/>
     <p:sldId id="273" r:id="rId25"/>
-    <p:sldId id="265" r:id="rId11"/>
-    <p:sldId id="266" r:id="rId12"/>
-    <p:sldId id="267" r:id="rId13"/>
     <p:sldId id="268" r:id="rId14"/>
-    <p:sldId id="269" r:id="rId15"/>
     <p:sldId id="270" r:id="rId16"/>
     <p:sldId id="271" r:id="rId17"/>
   </p:sldIdLst>
@@ -344,7 +346,7 @@
           <a:p>
             <a:r>
               <a:rPr lang="en-US" dirty="0"/>
-              <a:t>[0:00–1:00 of the 3-minute hook] Good morning, Badgers! One rule for the next 45 minutes: I talk, you talk back. Deal? I'm going to tell you about a job that did not exist when your teachers were your age. Nobody had heard of it. Now it is one of the most in-demand jobs in the world. But first I need to find out something about YOU. Everybody stand up. (Wait until everyone is standing, then advance.)</a:t>
+              <a:t>[0:00–1:00] Good morning, Badgers! One rule for the next 45 minutes: I talk, you talk back. Deal? I'm going to tell you about a job that did not exist when your teachers were your age. Nobody had heard of it. Now it is one of the most in-demand jobs in the world. But before the job, the kid. Let me tell you how I got here. (Advance.)</a:t>
             </a:r>
           </a:p>
         </p:txBody>
@@ -431,7 +433,7 @@
           <a:p>
             <a:r>
               <a:rPr lang="en-US" dirty="0"/>
-              <a:t>[22:00–24:00, 2 min] PROP: four printed cards, shuffled. Who wants to put these in order? Let a volunteer arrange them on the board; the class corrects. The real order: ask, draw, test, explain, then repeat. Notice what is missing: type code for eight hours. Some days I write code. Most days I am talking to a doctor's office, a school, or a store, figuring out what they need, drawing how the cloud and AI pieces fit, testing it, and then explaining it in plain English. The explaining part is the hardest and the most important. If I cannot explain it to you, I cannot explain it to my customers. Because AI makes mistakes, my job includes making sure people use it safely. Your turn.</a:t>
+              <a:t>[12:00–14:00, 2 min] PROP: four printed cards, shuffled. Who wants to put these in order? Let a volunteer arrange them on the board; the class corrects. The real order: ask, draw, test, explain, then repeat. Notice what is missing: type code for eight hours. Some days I write code. Most days I am talking to a doctor's office, a school, or a store, figuring out what they need, drawing how the cloud and AI pieces fit, testing it, and then explaining it in plain English. The explaining part is the hardest and the most important. If I cannot explain it to you, I cannot explain it to my customers. And the most exciting thing I get to design with right now is AI. You already use it more than you think. Everybody stand up.</a:t>
             </a:r>
           </a:p>
         </p:txBody>
@@ -518,7 +520,7 @@
           <a:p>
             <a:r>
               <a:rPr lang="en-US" dirty="0"/>
-              <a:t>[24:00–28:00, 4 min] PROP: one red and one green index card per pair of students. Green card if you would trust the AI. Red card if you would check it or stop. Run all six fast, then discuss three. MEDICINE: Red. Always a person: a parent, a nurse, a doctor. ADDRESS: Red, and close the window. AI tools remember what you type and real people can read it. Never type your full name, address, school login, phone number, or anything about your friends. BOOK REPORT: Red, and not just because it is against the rules. If the AI writes it, your brain did not grow. Use AI to quiz yourself, explain a hard paragraph, or check your outline. Do not use it to skip the thinking. CAPITAL OF TEXAS: green-ish, but it costs you five seconds to check, and you would look silly if it said Dallas. Let me put those into four rules you can remember.</a:t>
+              <a:t>[25:00–29:00, 4 min] PROP: one red and one green index card per pair of students. Green card if you would trust the AI. Red card if you would check it or stop. Run all six fast, then discuss three. MEDICINE: Red. Always a person: a parent, a nurse, a doctor. ADDRESS: Red, and close the window. AI tools remember what you type and real people can read it. Never type your full name, address, school login, phone number, or anything about your friends. BOOK REPORT: Red, and not just because it is against the rules. If the AI writes it, your brain did not grow. Use AI to quiz yourself, explain a hard paragraph, or check your outline. Do not use it to skip the thinking. CAPITAL OF TEXAS: green-ish, but it costs you five seconds to check, and you would look silly if it said Dallas. Let me put those into four rules you can remember.</a:t>
             </a:r>
           </a:p>
         </p:txBody>
@@ -605,7 +607,7 @@
           <a:p>
             <a:r>
               <a:rPr lang="en-US" dirty="0"/>
-              <a:t>[28:00–30:00, 2 min] Read rules one through three. Then: everybody read rule four out loud with me. (Class reads in unison.) One more test you can run any time: ask an AI the same question two different ways and see if the answers match. If they do not, one of them is wrong, and the AI does not know which. So how does a Badger end up in a job like this? Easier than you think.</a:t>
+              <a:t>[29:00–31:00, 2 min] Read rules one through three. Then: everybody read rule four out loud with me. (Class reads in unison.) One more test you can run any time: ask an AI the same question two different ways and see if the answers match. If they do not, one of them is wrong, and the AI does not know which. Now let's see if you can catch an AI being wrong.</a:t>
             </a:r>
           </a:p>
         </p:txBody>
@@ -692,7 +694,7 @@
           <a:p>
             <a:r>
               <a:rPr lang="en-US" dirty="0"/>
-              <a:t>[30:00–33:00, 3 min] Raise your hand for your favorite subject: math? science? English? art? PE? Point at each group as you go. Math teaches you patterns; that is AI. Science teaches you to test ideas; that is how we find bugs. English teaches you to explain; that is half my job. Art teaches you to design; architects design. PE and sports teach strategy and teamwork. Every hand in this room is already on the path. Coding is one door into this field, and it is a great one, but it is not the only one. Some of the best people I work with started as writers, artists, or teachers. Right now your job is to stay curious, finish what you start, and get good at explaining things to other people. Which brings me to your mission, and you are doing it right now, in this room.</a:t>
+              <a:t>[39:00–41:00, 2 min] Raise your hand for your favorite subject: math? science? English? art? PE? Point at each group as you go. Math teaches you patterns; that is AI. Science teaches you to test ideas; that is how we find bugs. English teaches you to explain; that is half my job. Art teaches you to design; architects design. PE and sports teach strategy and teamwork. Every hand in this room is already on the path. Coding is one door into this field, and it is a great one, but it is not the only one. Some of the best people I work with started as writers, artists, or teachers. Right now your job is to stay curious, finish what you start, and get good at explaining things to other people. Now everybody say the takeaway with me.</a:t>
             </a:r>
           </a:p>
         </p:txBody>
@@ -779,7 +781,7 @@
           <a:p>
             <a:r>
               <a:rPr lang="en-US" dirty="0"/>
-              <a:t>[33:00–37:00, 4 min] Your mission, right now: an AI wrote this paragraph about badgers. Three things in it are wrong. Two minutes with the person next to you. Find all three and be ready to say HOW you know. Go. (Walk the room for 2 minutes.) Then take answers. The three mistakes: badgers cannot fly; a badger's favorite food is not pizza (they eat small animals like rodents and insects); and nocturnal means active at NIGHT, not during the day. The true parts: setts, digging, long claws, and American badgers really do live across Texas. Notice how smooth it sounded. Polished writing is not the same as correct writing. You just did my job: you did not trust it, you checked it. Give out your prizes here or save them for trivia at the end.</a:t>
+              <a:t>[31:00–34:00, 3 min] Your mission, right now: an AI wrote this paragraph about badgers. Three things in it are wrong. Two minutes with the person next to you. Find all three and be ready to say HOW you know. Go. (Walk the room for 2 minutes.) Then take answers. The three mistakes: badgers cannot fly; a badger's favorite food is not pizza (they eat small animals like rodents and insects); and nocturnal means active at NIGHT, not during the day. The true parts: setts, digging, long claws, and American badgers really do live across Texas. Notice how smooth it sounded. Polished writing is not the same as correct writing. You just did my job: you did not trust it, you checked it. Give out your prizes here or save them for trivia at the end. You just did my job. Now watch me do it live: I built an AI for this school, and you get to test it.</a:t>
             </a:r>
           </a:p>
         </p:txBody>
@@ -866,7 +868,7 @@
           <a:p>
             <a:r>
               <a:rPr lang="en-US" dirty="0"/>
-              <a:t>[37:00–39:00, 2 min] Everybody say the takeaway with me. Lead the class through both lines twice, louder the second time. That is it. You now understand AI better than most adults. You know what my job is, you know the cloud is a building and not a cloud, and you know the one question to ask any AI: how do you know that? We have a few minutes. Questions first, then trivia.</a:t>
+              <a:t>[41:00–42:00, 1 min] Everybody say the takeaway with me. Lead the class through both lines twice, louder the second time. That is it. You now understand AI better than most adults. You know what my job is, you know the cloud is a building and not a cloud, and you know the one question to ask any AI: how do you know that? We have a few minutes. Questions first, then trivia.</a:t>
             </a:r>
           </a:p>
         </p:txBody>
@@ -953,7 +955,7 @@
           <a:p>
             <a:r>
               <a:rPr lang="en-US" dirty="0"/>
-              <a:t>[39:00–45:00, 6 min] Take student questions first; prepared answers are in section E of the plan doc (jobs, thinking, knows everything, cheating, pay: no number from memory, cite the current local figure you looked up). With whatever time remains, run trivia from section D, easy questions first so more students win. Alternate hands-up with a random pick (someone wearing blue) so the same three students do not win everything. Close on time: Thank you, Badgers. Stay curious, and go catch an AI being wrong. Leave this slide up as they exit. Close the chatbot window on your laptop before you unplug.</a:t>
+              <a:t>[42:00–45:00, 3 min] Take student questions first; prepared answers are in section E of the plan doc (jobs, thinking, knows everything, cheating, pay: no number from memory, cite the current local figure you looked up). With whatever time remains, run trivia from section D, easy questions first so more students win. Alternate hands-up with a random pick (someone wearing blue) so the same three students do not win everything. Close on time: Thank you, Badgers. Stay curious, and go catch an AI being wrong. Leave this slide up as they exit. Close the chatbot window on your laptop before you unplug.</a:t>
             </a:r>
           </a:p>
         </p:txBody>
@@ -1040,7 +1042,7 @@
           <a:p>
             <a:r>
               <a:rPr lang="en-US" dirty="0"/>
-              <a:t>[22:00–23:00, 1 min; take it from the Ask Me Anything block] You just watched Badger AI answer. This is the plan I drew before anyone built it, the same way the building architect draws the gym and the exits. Point at the numbers, one sentence each. 1: that is you, typing on the chat page. 2: the rulebook, a small program whose rules are written in plain English, like 'always check the library first' and 'never guess'. 3: the brain, Google's Gemini model, which turns facts into friendly sentences. 4: the library, a saved copy of the school website; the AI may only use what it finds there, which is why it admitted it did not know about the bridge. 5: where it lives, a computer in a Google building that I rent by the second. 6: the helpers, cameras that record what happened and robots that rebuild the app when I change the plan. Every box is a decision an architect makes, and every arrow is a hallway I had to design. Nobody handed me this drawing. So what does a day of drawing plans actually look like? (Advance.)</a:t>
+              <a:t>[37:00–39:00, 2 min] You just watched Badger AI answer. This is the plan I drew before anyone built it, the same way the building architect draws the gym and the exits. Point at the numbers, one sentence each. 1: that is you, typing on the chat page. 2: the rulebook, a small program whose rules are written in plain English, like 'always check the library first' and 'never guess'. 3: the brain, Google's Gemini model, which turns facts into friendly sentences. 4: the library, a saved copy of the school website; the AI may only use what it finds there, which is why it admitted it did not know about the bridge. 5: where it lives, a computer in a Google building that I rent by the second. 6: the helpers, cameras that record what happened and robots that rebuild the app when I change the plan. Every box is a decision an architect makes, and every arrow is a hallway I had to design. Nobody handed me this drawing. Every hand in this room could draw a plan like this one day. Here is how you start. (Advance.)</a:t>
             </a:r>
           </a:p>
         </p:txBody>
@@ -1063,6 +1065,93 @@
             <a:fld id="{F7021451-1387-4CA6-816F-3879F97B5CBC}" type="slidenum">
               <a:rPr lang="en-US"/>
               <a:t>9</a:t>
+            </a:fld>
+            <a:endParaRPr lang="en-US"/>
+          </a:p>
+        </p:txBody>
+      </p:sp>
+    </p:spTree>
+    <p:extLst>
+      <p:ext uri="{BB962C8B-B14F-4D97-AF65-F5344CB8AC3E}">
+        <p14:creationId xmlns:p14="http://schemas.microsoft.com/office/powerpoint/2010/main" val="1024086991"/>
+      </p:ext>
+    </p:extLst>
+  </p:cSld>
+  <p:clrMapOvr>
+    <a:masterClrMapping/>
+  </p:clrMapOvr>
+</p:notes>
+</file>
+
+<file path=ppt/notesSlides/notesSlide19.xml><?xml version="1.0" encoding="utf-8"?>
+<p:notes xmlns:a="http://schemas.openxmlformats.org/drawingml/2006/main" xmlns:r="http://schemas.openxmlformats.org/officeDocument/2006/relationships" xmlns:p="http://schemas.openxmlformats.org/presentationml/2006/main">
+  <p:cSld>
+    <p:spTree>
+      <p:nvGrpSpPr>
+        <p:cNvPr id="1" name=""/>
+        <p:cNvGrpSpPr/>
+        <p:nvPr/>
+      </p:nvGrpSpPr>
+      <p:grpSpPr>
+        <a:xfrm>
+          <a:off x="0" y="0"/>
+          <a:ext cx="0" cy="0"/>
+          <a:chOff x="0" y="0"/>
+          <a:chExt cx="0" cy="0"/>
+        </a:xfrm>
+      </p:grpSpPr>
+      <p:sp>
+        <p:nvSpPr>
+          <p:cNvPr id="2" name="Slide Image Placeholder 1"/>
+          <p:cNvSpPr>
+            <a:spLocks noGrp="1" noRot="1" noChangeAspect="1"/>
+          </p:cNvSpPr>
+          <p:nvPr>
+            <p:ph type="sldImg"/>
+          </p:nvPr>
+        </p:nvSpPr>
+        <p:spPr/>
+      </p:sp>
+      <p:sp>
+        <p:nvSpPr>
+          <p:cNvPr id="3" name="Notes Placeholder 2"/>
+          <p:cNvSpPr>
+            <a:spLocks noGrp="1"/>
+          </p:cNvSpPr>
+          <p:nvPr>
+            <p:ph type="body" idx="1"/>
+          </p:nvPr>
+        </p:nvSpPr>
+        <p:spPr/>
+        <p:txBody>
+          <a:bodyPr/>
+          <a:lstStyle/>
+          <a:p>
+            <a:r>
+              <a:rPr lang="en-US" dirty="0"/>
+              <a:t>[1:00–3:00, 2 min] PERSONAL STORY. Fill the three cards with your own moments before the day, in your words. Beat 1: what you were into at their age, and that it did not look like 'tech' at the time. Beat 2: the first thing you built, fixed, or took apart and could not stop thinking about. Beat 3: the first real step into technology and who opened that door for you. Keep each beat to two sentences and make one of them funny. Land it on: I did not plan to do this job. When I was sitting where you are, it did not exist yet. (Advance.)</a:t>
+            </a:r>
+          </a:p>
+        </p:txBody>
+      </p:sp>
+      <p:sp>
+        <p:nvSpPr>
+          <p:cNvPr id="4" name="Slide Number Placeholder 3"/>
+          <p:cNvSpPr>
+            <a:spLocks noGrp="1"/>
+          </p:cNvSpPr>
+          <p:nvPr>
+            <p:ph type="sldNum" sz="quarter" idx="10"/>
+          </p:nvPr>
+        </p:nvSpPr>
+        <p:spPr/>
+        <p:txBody>
+          <a:bodyPr/>
+          <a:lstStyle/>
+          <a:p>
+            <a:fld id="{F7021451-1387-4CA6-816F-3879F97B5CBC}" type="slidenum">
+              <a:rPr lang="en-US"/>
+              <a:t>2</a:t>
             </a:fld>
             <a:endParaRPr lang="en-US"/>
           </a:p>
@@ -1127,7 +1216,94 @@
           <a:p>
             <a:r>
               <a:rPr lang="en-US" dirty="0"/>
-              <a:t>[1:00–3:00] Sit down ONLY if you have never done the thing I read. Read the six cards one at a time, slowly. Pause for laughs when nobody sits. Then: Look around. Almost everyone is still standing. Every one of those six things is artificial intelligence. You have been using AI since before breakfast. Now... sit down if you know what makes it actually work. (Everyone sits.) Perfect. That gap between USING AI and UNDERSTANDING AI is exactly where my job lives. So what is my job? Let's see what you think first.</a:t>
+              <a:t>[14:00–16:00, 2 min] (Wait until everyone is standing.) Sit down ONLY if you have never done the thing I read. Read the six cards one at a time, slowly. Pause for laughs when nobody sits. Then: Look around. Almost everyone is still standing. Every one of those six things is artificial intelligence. You have been using AI since before breakfast. Now... sit down if you know what makes it actually work. (Everyone sits.) Perfect. That gap between USING AI and UNDERSTANDING AI is exactly where my job lives. So let's get clear on what AI actually is.</a:t>
+            </a:r>
+          </a:p>
+        </p:txBody>
+      </p:sp>
+      <p:sp>
+        <p:nvSpPr>
+          <p:cNvPr id="4" name="Slide Number Placeholder 3"/>
+          <p:cNvSpPr>
+            <a:spLocks noGrp="1"/>
+          </p:cNvSpPr>
+          <p:nvPr>
+            <p:ph type="sldNum" sz="quarter" idx="10"/>
+          </p:nvPr>
+        </p:nvSpPr>
+        <p:spPr/>
+        <p:txBody>
+          <a:bodyPr/>
+          <a:lstStyle/>
+          <a:p>
+            <a:fld id="{F7021451-1387-4CA6-816F-3879F97B5CBC}" type="slidenum">
+              <a:rPr lang="en-US"/>
+              <a:t>2</a:t>
+            </a:fld>
+            <a:endParaRPr lang="en-US"/>
+          </a:p>
+        </p:txBody>
+      </p:sp>
+    </p:spTree>
+    <p:extLst>
+      <p:ext uri="{BB962C8B-B14F-4D97-AF65-F5344CB8AC3E}">
+        <p14:creationId xmlns:p14="http://schemas.microsoft.com/office/powerpoint/2010/main" val="1024086991"/>
+      </p:ext>
+    </p:extLst>
+  </p:cSld>
+  <p:clrMapOvr>
+    <a:masterClrMapping/>
+  </p:clrMapOvr>
+</p:notes>
+</file>
+
+<file path=ppt/notesSlides/notesSlide20.xml><?xml version="1.0" encoding="utf-8"?>
+<p:notes xmlns:a="http://schemas.openxmlformats.org/drawingml/2006/main" xmlns:r="http://schemas.openxmlformats.org/officeDocument/2006/relationships" xmlns:p="http://schemas.openxmlformats.org/presentationml/2006/main">
+  <p:cSld>
+    <p:spTree>
+      <p:nvGrpSpPr>
+        <p:cNvPr id="1" name=""/>
+        <p:cNvGrpSpPr/>
+        <p:nvPr/>
+      </p:nvGrpSpPr>
+      <p:grpSpPr>
+        <a:xfrm>
+          <a:off x="0" y="0"/>
+          <a:ext cx="0" cy="0"/>
+          <a:chOff x="0" y="0"/>
+          <a:chExt cx="0" cy="0"/>
+        </a:xfrm>
+      </p:grpSpPr>
+      <p:sp>
+        <p:nvSpPr>
+          <p:cNvPr id="2" name="Slide Image Placeholder 1"/>
+          <p:cNvSpPr>
+            <a:spLocks noGrp="1" noRot="1" noChangeAspect="1"/>
+          </p:cNvSpPr>
+          <p:nvPr>
+            <p:ph type="sldImg"/>
+          </p:nvPr>
+        </p:nvSpPr>
+        <p:spPr/>
+      </p:sp>
+      <p:sp>
+        <p:nvSpPr>
+          <p:cNvPr id="3" name="Notes Placeholder 2"/>
+          <p:cNvSpPr>
+            <a:spLocks noGrp="1"/>
+          </p:cNvSpPr>
+          <p:nvPr>
+            <p:ph type="body" idx="1"/>
+          </p:nvPr>
+        </p:nvSpPr>
+        <p:spPr/>
+        <p:txBody>
+          <a:bodyPr/>
+          <a:lstStyle/>
+          <a:p>
+            <a:r>
+              <a:rPr lang="en-US" dirty="0"/>
+              <a:t>[3:00–5:00, 2 min] Point at the three dates. When your teachers were in middle school there was no cloud. In 2006 Amazon opened the first big public cloud; Google followed in 2008 and Microsoft in 2010. Before that, every company had to buy and run its own computers. Today nearly every app on your phone, the games, the streaming, the maps, the chatbots, runs in one of those buildings, and somebody has to decide how all the pieces fit together. That somebody is a Cloud Architect. You have never heard of it for a simple reason: if I do my job right, you never see it. The app just works. So what do you think I actually do all day? Let's find out what you think first.</a:t>
             </a:r>
           </a:p>
         </p:txBody>
@@ -1214,7 +1390,7 @@
           <a:p>
             <a:r>
               <a:rPr lang="en-US" dirty="0"/>
-              <a:t>[3:00–5:00, 2 min] Show ONLY the left card first if you can; otherwise cover it with your hand. Hands up if you think I sit in a dark room typing green code all day. Hands up if you think I fix the school Wi-Fi. Count both. Here is the truth. My title is Cloud and AI Architect. Most of my day is drawing plans, asking questions, and explaining things to people. I spend more time with a whiteboard marker than a keyboard. I work on a team; I almost never work alone. And no, I cannot fix your Wi-Fi. Ask the librarian. That word ARCHITECT is the key. Let me show you why.</a:t>
+              <a:t>[5:00–7:00, 2 min] Show ONLY the left card first if you can; otherwise cover it with your hand. Hands up if you think I sit in a dark room typing green code all day. Hands up if you think I fix the school Wi-Fi. Count both. Here is the truth. My title is Cloud and AI Architect. Most of my day is drawing plans, asking questions, and explaining things to people. I spend more time with a whiteboard marker than a keyboard. I work on a team; I almost never work alone. And no, I cannot fix your Wi-Fi. Ask the librarian. That word ARCHITECT is the key. Let me show you why.</a:t>
             </a:r>
           </a:p>
         </p:txBody>
@@ -1301,7 +1477,7 @@
           <a:p>
             <a:r>
               <a:rPr lang="en-US" dirty="0"/>
-              <a:t>[5:00–7:00, 2 min] PROP: hand the rolled-up blueprint to a volunteer from the front row. When somebody builds a school, a building architect draws the plan first: where the gym goes, where the exits are, where the electricity runs. They do not lay every brick. They make sure the whole thing fits together and does not fall down. I do the exact same thing, but my building is made of apps, data, and AI. I decide which pieces talk to each other, where the information is stored, and how to keep it safe. Ask the class: what happens if the architect forgets the exits? (Take one answer.) If I draw a bad plan, the app is slow, crashes, or leaks your information. If I draw a good plan, you never even notice it is there. The building my plans live in is called the cloud. Where do you think that is?</a:t>
+              <a:t>[7:00–9:00, 2 min] PROP: hand the rolled-up blueprint to a volunteer from the front row. When somebody builds a school, a building architect draws the plan first: where the gym goes, where the exits are, where the electricity runs. They do not lay every brick. They make sure the whole thing fits together and does not fall down. I do the exact same thing, but my building is made of apps, data, and AI. I decide which pieces talk to each other, where the information is stored, and how to keep it safe. Ask the class: what happens if the architect forgets the exits? (Take one answer.) If I draw a bad plan, the app is slow, crashes, or leaks your information. If I draw a good plan, you never even notice it is there. The building my plans live in is called the cloud. Where do you think that is?</a:t>
             </a:r>
           </a:p>
         </p:txBody>
@@ -1388,7 +1564,7 @@
           <a:p>
             <a:r>
               <a:rPr lang="en-US" dirty="0"/>
-              <a:t>[7:00–10:00, 3 min] Vote with fingers: when you save a game, where is the save file? One finger: in the sky. Two: on your device. Three: in a building somewhere. Take the vote. Mostly three. The cloud is just other people's computers, thousands of them, in giant warehouses, and companies rent them by the second over the internet. Your game saves, your photos, the videos you stream, and the AI chatbots all live there. The cloud gives AI four things: the POWER to think fast, the STORAGE to remember, the SECURITY to keep stuff safe, and the CONNECTION so it works on your phone and your friend's phone at the same time. My job is choosing which buildings, which computers, and how they connect. It is like choosing which gym, which classrooms, and which hallways go where. The most exciting thing living in those buildings right now is AI. So let's get clear on what AI actually is.</a:t>
+              <a:t>[9:00–12:00, 3 min] Vote with fingers: when you save a game, where is the save file? One finger: in the sky. Two: on your device. Three: in a building somewhere. Take the vote. Mostly three. The cloud is just other people's computers, thousands of them, in giant warehouses, and companies rent them by the second over the internet. Your game saves, your photos, the videos you stream, and the AI chatbots all live there. The cloud gives AI four things: the POWER to think fast, the STORAGE to remember, the SECURITY to keep stuff safe, and the CONNECTION so it works on your phone and your friend's phone at the same time. My job is choosing which buildings, which computers, and how they connect. It is like choosing which gym, which classrooms, and which hallways go where. So what do I actually do all day with those buildings? Let me show you. I need a volunteer.</a:t>
             </a:r>
           </a:p>
         </p:txBody>
@@ -1475,7 +1651,7 @@
           <a:p>
             <a:r>
               <a:rPr lang="en-US" dirty="0"/>
-              <a:t>[10:00–13:00, 3 min] Thumbs up if it is AI, thumbs down if not. A calculator? DOWN: it follows exact rules, it never learns. A map app that reroutes you around traffic? UP: it learned from millions of trips. A movie robot that has feelings? DOWN: that is a story. Autocorrect? UP: it learned from a huge pile of text. Here is the definition I want you to remember: AI is a program that learns patterns from examples instead of being told exact rules. It does not understand things the way you do. It is very good at guessing what usually comes next. That is it. That is the whole trick. And because it is guessing, it can guess wrong. Want to see how it guesses? You are about to become the AI.</a:t>
+              <a:t>[16:00–19:00, 3 min] Thumbs up if it is AI, thumbs down if not. A calculator? DOWN: it follows exact rules, it never learns. A map app that reroutes you around traffic? UP: it learned from millions of trips. A movie robot that has feelings? DOWN: that is a story. Autocorrect? UP: it learned from a huge pile of text. Here is the definition I want you to remember: AI is a program that learns patterns from examples instead of being told exact rules. It does not understand things the way you do. It is very good at guessing what usually comes next. That is it. That is the whole trick. And because it is guessing, it can guess wrong. Want to see how it guesses? You are about to become the AI.</a:t>
             </a:r>
           </a:p>
         </p:txBody>
@@ -1562,7 +1738,7 @@
           <a:p>
             <a:r>
               <a:rPr lang="en-US" dirty="0"/>
-              <a:t>[13:00–16:00, 3 min] Cover the lower lines with your hand or read them one at a time. When I read a sentence, shout the next word. Ready? Peanut butter and... (JELLY). Once upon a... (TIME). How did you know? Nobody taught you a rule. You have heard it a thousand times. That is EXACTLY how a chatbot works: it has read an enormous amount of writing and it predicts the most likely next word, then the next, then the next. Now: The Badgers are going to... (mixed: WIN, STATE, LUNCH). See? When the pattern is not clear, you all guess differently, and so does the AI. It picks the most COMMON answer, not the TRUE one. Last one: My favorite class is... (chaos). The AI has no idea what YOUR favorite class is. It will still answer confidently. Remember that. So where does the AI get all those examples? From something called training data.</a:t>
+              <a:t>[19:00–22:00, 3 min] Cover the lower lines with your hand or read them one at a time. When I read a sentence, shout the next word. Ready? Peanut butter and... (JELLY). Once upon a... (TIME). How did you know? Nobody taught you a rule. You have heard it a thousand times. That is EXACTLY how a chatbot works: it has read an enormous amount of writing and it predicts the most likely next word, then the next, then the next. Now: The Badgers are going to... (mixed: WIN, STATE, LUNCH). See? When the pattern is not clear, you all guess differently, and so does the AI. It picks the most COMMON answer, not the TRUE one. Last one: My favorite class is... (chaos). The AI has no idea what YOUR favorite class is. It will still answer confidently. Remember that. So where does the AI get all those examples? From something called training data.</a:t>
             </a:r>
           </a:p>
         </p:txBody>
@@ -1649,7 +1825,7 @@
           <a:p>
             <a:r>
               <a:rPr lang="en-US" dirty="0"/>
-              <a:t>[16:00–19:00, 3 min] Imagine I show you ten thousand photos labeled cat and ten thousand labeled dog. After a while you would get good at telling them apart, even for a cat you had never seen. You could not explain the rule; you would just KNOW. AI does the same thing with numbers instead of eyes. Show it enough examples and it finds the pattern. Three things to notice. One: if the examples are bad or one-sided, the AI learns bad patterns. If every dog photo was taken outside and every cat photo inside, it might decide outside means dog. Two: it can be confidently wrong, like this fluffy dog labeled cat. Three: the examples, the computers that crunch them, and the place the AI lives are all in the cloud, which is why my job and AI are connected. Ask: what is an example that would confuse a cat-vs-dog AI? Take two answers. Enough talking about it. Let's see a real one, fast.</a:t>
+              <a:t>[22:00–25:00, 3 min] Imagine I show you ten thousand photos labeled cat and ten thousand labeled dog. After a while you would get good at telling them apart, even for a cat you had never seen. You could not explain the rule; you would just KNOW. AI does the same thing with numbers instead of eyes. Show it enough examples and it finds the pattern. Three things to notice. One: if the examples are bad or one-sided, the AI learns bad patterns. If every dog photo was taken outside and every cat photo inside, it might decide outside means dog. Two: it can be confidently wrong, like this fluffy dog labeled cat. Three: the examples, the computers that crunch them, and the place the AI lives are all in the cloud, which is why my job and AI are connected. Ask: what is an example that would confuse a cat-vs-dog AI? Take two answers. And because it is guessing, you need to know when to trust it. Your turn.</a:t>
             </a:r>
           </a:p>
         </p:txBody>
@@ -1736,7 +1912,7 @@
           <a:p>
             <a:r>
               <a:rPr lang="en-US" dirty="0"/>
-              <a:t>[19:00–22:00, 3 min, hard stop] SETUP: Willkie Badger AI already open in a clean browser window at the address on this slide (or http://localhost:8000 after `make dev`). There is no Badger Bridge. I made it up. Predict: thumbs up if the AI will admit it does not know; thumbs down if it will invent something. Count. Click the dark 'Badger Test' button under the chat (the question is pre-loaded), then read the answer aloud. Click 'How I answered' under the answer: the class sees the AI open the school library first and find nothing about a bridge. Two outcomes, both teach the lesson. IF IT SAYS IT CANNOT FIND IT: That is a well-designed AI doing the right thing, admitting it does not know. I built it that way on purpose. But not every AI does this. IF IT INVENTS A STORY: It just made that up with total confidence. This is called a hallucination. It is not lying; it is predicting what a sentence about a historic bridge usually looks like. Either way: you now know the question to ask any AI. HOW DO YOU KNOW THAT? Phones: the QR code opens the same chatbot; it saves nothing and needs no login. NO INTERNET BACKUP: project the hidden screenshot you captured the night before and run the same vote. Say: the Wi-Fi is taking a nap, so I brought the AI's homework with me. If the page does not load in 60 seconds, switch to the screenshot without further comment.</a:t>
+              <a:t>[34:00–37:00, 3 min, hard stop] SETUP: Willkie Badger AI already open in a clean browser window at the address on this slide (or http://localhost:8000 after `make dev`). There is no Badger Bridge. I made it up. Predict: thumbs up if the AI will admit it does not know; thumbs down if it will invent something. Count. Click the dark 'Badger Test' button under the chat (the question is pre-loaded), then read the answer aloud. Click 'How I answered' under the answer: the class sees the AI open the school library first and find nothing about a bridge. Two outcomes, both teach the lesson. IF IT SAYS IT CANNOT FIND IT: That is a well-designed AI doing the right thing, admitting it does not know. I built it that way on purpose. But not every AI does this. IF IT INVENTS A STORY: It just made that up with total confidence. This is called a hallucination. It is not lying; it is predicting what a sentence about a historic bridge usually looks like. Either way: you now know the question to ask any AI. HOW DO YOU KNOW THAT? Phones: the QR code opens the same chatbot; it saves nothing and needs no login. NO INTERNET BACKUP: project the hidden screenshot you captured the night before and run the same vote. Say: the Wi-Fi is taking a nap, so I brought the AI's homework with me. If the page does not load in 60 seconds, switch to the screenshot without further comment. Then advance: here is how I built it.</a:t>
             </a:r>
           </a:p>
         </p:txBody>
@@ -3350,7 +3526,7 @@
                 <a:ea typeface="Nunito Sans" pitchFamily="34" charset="-122"/>
                 <a:cs typeface="Nunito Sans" pitchFamily="34" charset="-120"/>
               </a:rPr>
-              <a:t>ACTIVITY 3 · GREEN CARD = TRUST IT · RED CARD = CHECK IT OR STOP</a:t>
+              <a:t>ACTIVITY 2 · GREEN CARD = TRUST IT · RED CARD = CHECK IT OR STOP</a:t>
             </a:r>
             <a:endParaRPr lang="en-US" sz="1400" dirty="0"/>
           </a:p>
@@ -7008,7 +7184,7 @@
                 <a:ea typeface="Nunito Sans" pitchFamily="34" charset="-122"/>
                 <a:cs typeface="Nunito Sans" pitchFamily="34" charset="-120"/>
               </a:rPr>
-              <a:t>LAST 6 MINUTES</a:t>
+              <a:t>LAST 3 MINUTES</a:t>
             </a:r>
             <a:endParaRPr lang="en-US" sz="1400" dirty="0"/>
           </a:p>
@@ -8748,6 +8924,678 @@
 </p:sld>
 </file>
 
+<file path=ppt/slides/slide19.xml><?xml version="1.0" encoding="utf-8"?>
+<p:sld xmlns:a="http://schemas.openxmlformats.org/drawingml/2006/main" xmlns:r="http://schemas.openxmlformats.org/officeDocument/2006/relationships" xmlns:p="http://schemas.openxmlformats.org/presentationml/2006/main">
+  <p:cSld name="Slide 2">
+    <p:bg>
+      <p:bgPr>
+        <a:solidFill>
+          <a:srgbClr val="F6F3EE"/>
+        </a:solidFill>
+        <a:effectLst/>
+      </p:bgPr>
+    </p:bg>
+    <p:spTree>
+      <p:nvGrpSpPr>
+        <p:cNvPr id="1" name=""/>
+        <p:cNvGrpSpPr/>
+        <p:nvPr/>
+      </p:nvGrpSpPr>
+      <p:grpSpPr>
+        <a:xfrm>
+          <a:off x="0" y="0"/>
+          <a:ext cx="0" cy="0"/>
+          <a:chOff x="0" y="0"/>
+          <a:chExt cx="0" cy="0"/>
+        </a:xfrm>
+      </p:grpSpPr>
+      <p:sp>
+        <p:nvSpPr>
+          <p:cNvPr id="2" name="Text 0"/>
+          <p:cNvSpPr/>
+          <p:nvPr/>
+        </p:nvSpPr>
+        <p:spPr>
+          <a:xfrm>
+            <a:off x="812800" y="812800"/>
+            <a:ext cx="10883392" cy="274241"/>
+          </a:xfrm>
+          <a:prstGeom prst="rect">
+            <a:avLst/>
+          </a:prstGeom>
+          <a:noFill/>
+          <a:ln/>
+        </p:spPr>
+        <p:txBody>
+          <a:bodyPr wrap="square" lIns="0" tIns="0" rIns="0" bIns="0" rtlCol="0" anchor="t">
+            <a:normAutofit/>
+          </a:bodyPr>
+          <a:lstStyle/>
+          <a:p>
+            <a:pPr marL="0" indent="0" algn="l">
+              <a:lnSpc>
+                <a:spcPts val="1960"/>
+              </a:lnSpc>
+              <a:buNone/>
+            </a:pPr>
+            <a:r>
+              <a:rPr lang="en-US" sz="1400" b="1" kern="0" spc="200" dirty="0">
+                <a:solidFill>
+                  <a:srgbClr val="D21F2B"/>
+                </a:solidFill>
+                <a:latin typeface="Nunito Sans" pitchFamily="34" charset="0"/>
+                <a:ea typeface="Nunito Sans" pitchFamily="34" charset="-122"/>
+                <a:cs typeface="Nunito Sans" pitchFamily="34" charset="-120"/>
+              </a:rPr>
+              <a:t>MY STORY · BEFORE THIS JOB HAD A NAME</a:t>
+            </a:r>
+            <a:endParaRPr lang="en-US" sz="1400" dirty="0"/>
+          </a:p>
+        </p:txBody>
+      </p:sp>
+      <p:sp>
+        <p:nvSpPr>
+          <p:cNvPr id="3" name="Text 1"/>
+          <p:cNvSpPr>
+            <a:spLocks noGrp="1"/>
+          </p:cNvSpPr>
+          <p:nvPr>
+            <p:ph type="title"/>
+          </p:nvPr>
+        </p:nvSpPr>
+        <p:spPr>
+          <a:xfrm>
+            <a:off x="812800" y="1366441"/>
+            <a:ext cx="10883392" cy="665460"/>
+          </a:xfrm>
+          <a:prstGeom prst="rect">
+            <a:avLst/>
+          </a:prstGeom>
+          <a:noFill/>
+          <a:ln/>
+        </p:spPr>
+        <p:txBody>
+          <a:bodyPr wrap="square" lIns="0" tIns="0" rIns="0" bIns="0" rtlCol="0" anchor="t">
+            <a:normAutofit/>
+          </a:bodyPr>
+          <a:lstStyle/>
+          <a:p>
+            <a:pPr marL="0" indent="0" algn="l">
+              <a:lnSpc>
+                <a:spcPts val="5040"/>
+              </a:lnSpc>
+              <a:buNone/>
+            </a:pPr>
+            <a:r>
+              <a:rPr lang="en-US" sz="4800" b="1" i="0" dirty="0">
+                <a:solidFill>
+                  <a:srgbClr val="161616"/>
+                </a:solidFill>
+                <a:latin typeface="Oswald" pitchFamily="34" charset="0"/>
+                <a:ea typeface="Oswald" pitchFamily="34" charset="-122"/>
+                <a:cs typeface="Oswald" pitchFamily="34" charset="-120"/>
+              </a:rPr>
+              <a:t>WHEN I WAS YOUR AGE</a:t>
+            </a:r>
+            <a:endParaRPr lang="en-US" sz="4800" dirty="0"/>
+          </a:p>
+        </p:txBody>
+      </p:sp>
+      <p:sp>
+        <p:nvSpPr>
+          <p:cNvPr id="22" name="Text 14"/>
+          <p:cNvSpPr/>
+          <p:nvPr/>
+        </p:nvSpPr>
+        <p:spPr>
+          <a:xfrm>
+            <a:off x="812800" y="6238280"/>
+            <a:ext cx="10883392" cy="238720"/>
+          </a:xfrm>
+          <a:prstGeom prst="rect">
+            <a:avLst/>
+          </a:prstGeom>
+          <a:noFill/>
+          <a:ln/>
+        </p:spPr>
+        <p:txBody>
+          <a:bodyPr wrap="square" lIns="0" tIns="0" rIns="0" bIns="0" rtlCol="0" anchor="t">
+            <a:normAutofit/>
+          </a:bodyPr>
+          <a:lstStyle/>
+          <a:p>
+            <a:pPr marL="0" indent="0" algn="l">
+              <a:lnSpc>
+                <a:spcPts val="1680"/>
+              </a:lnSpc>
+              <a:buNone/>
+            </a:pPr>
+            <a:r>
+              <a:rPr lang="en-US" sz="1200" dirty="0">
+                <a:solidFill>
+                  <a:srgbClr val="8F8A82"/>
+                </a:solidFill>
+                <a:latin typeface="Nunito Sans" pitchFamily="34" charset="0"/>
+                <a:ea typeface="Nunito Sans" pitchFamily="34" charset="-122"/>
+                <a:cs typeface="Nunito Sans" pitchFamily="34" charset="-120"/>
+              </a:rPr>
+              <a:t>Ed Willkie Badgers · Career Day</a:t>
+            </a:r>
+            <a:endParaRPr lang="en-US" sz="1200" dirty="0"/>
+          </a:p>
+        </p:txBody>
+      </p:sp>
+      <p:sp>
+        <p:nvSpPr>
+          <p:cNvPr id="501" name="Story card 1"/>
+          <p:cNvSpPr/>
+          <p:nvPr/>
+        </p:nvSpPr>
+        <p:spPr>
+          <a:xfrm>
+            <a:off x="812902" y="2240280"/>
+            <a:ext cx="3264408" cy="2697480"/>
+          </a:xfrm>
+          <a:prstGeom prst="roundRect">
+            <a:avLst>
+              <a:gd name="adj" fmla="val 5000"/>
+            </a:avLst>
+          </a:prstGeom>
+          <a:solidFill>
+            <a:srgbClr val="FFFFFF"/>
+          </a:solidFill>
+          <a:ln w="12700">
+            <a:solidFill>
+              <a:srgbClr val="E4DED5"/>
+            </a:solidFill>
+            <a:prstDash val="solid"/>
+          </a:ln>
+        </p:spPr>
+        <p:txBody>
+          <a:bodyPr/>
+          <a:lstStyle/>
+          <a:p>
+            <a:endParaRPr lang="en-US"/>
+          </a:p>
+        </p:txBody>
+      </p:sp>
+      <p:pic>
+        <p:nvPicPr>
+          <p:cNvPr id="502" name="Story icon 1" descr="Star"/>
+          <p:cNvPicPr>
+            <a:picLocks noChangeAspect="1"/>
+          </p:cNvPicPr>
+          <p:nvPr/>
+        </p:nvPicPr>
+        <p:blipFill>
+          <a:blip r:embed="rId9"/>
+          <a:stretch>
+            <a:fillRect/>
+          </a:stretch>
+        </p:blipFill>
+        <p:spPr>
+          <a:xfrm>
+            <a:off x="1087222" y="2514600"/>
+            <a:ext cx="457200" cy="457200"/>
+          </a:xfrm>
+          <a:prstGeom prst="rect">
+            <a:avLst/>
+          </a:prstGeom>
+        </p:spPr>
+      </p:pic>
+      <p:sp>
+        <p:nvSpPr>
+          <p:cNvPr id="503" name="Story head 1"/>
+          <p:cNvSpPr txBox="1"/>
+          <p:nvPr/>
+        </p:nvSpPr>
+        <p:spPr>
+          <a:xfrm>
+            <a:off x="1087222" y="3136392"/>
+            <a:ext cx="2715768" cy="320040"/>
+          </a:xfrm>
+          <a:prstGeom prst="rect">
+            <a:avLst/>
+          </a:prstGeom>
+          <a:noFill/>
+          <a:ln/>
+        </p:spPr>
+        <p:txBody>
+          <a:bodyPr wrap="square" lIns="0" tIns="0" rIns="0" bIns="0" rtlCol="0" anchor="t">
+            <a:normAutofit/>
+          </a:bodyPr>
+          <a:lstStyle/>
+          <a:p>
+            <a:pPr marL="0" indent="0" algn="l">
+              <a:buNone/>
+            </a:pPr>
+            <a:r>
+              <a:rPr lang="en-US" sz="1600" b="1" spc="100" dirty="0">
+                <a:solidFill>
+                  <a:srgbClr val="D21F2B"/>
+                </a:solidFill>
+                <a:latin typeface="Nunito Sans" pitchFamily="34" charset="0"/>
+                <a:ea typeface="Nunito Sans" pitchFamily="34" charset="-122"/>
+                <a:cs typeface="Nunito Sans" pitchFamily="34" charset="-120"/>
+              </a:rPr>
+              <a:t>MIDDLE SCHOOL</a:t>
+            </a:r>
+          </a:p>
+        </p:txBody>
+      </p:sp>
+      <p:sp>
+        <p:nvSpPr>
+          <p:cNvPr id="504" name="Story body 1"/>
+          <p:cNvSpPr txBox="1"/>
+          <p:nvPr/>
+        </p:nvSpPr>
+        <p:spPr>
+          <a:xfrm>
+            <a:off x="1087222" y="3538728"/>
+            <a:ext cx="2715768" cy="1280160"/>
+          </a:xfrm>
+          <a:prstGeom prst="rect">
+            <a:avLst/>
+          </a:prstGeom>
+          <a:noFill/>
+          <a:ln/>
+        </p:spPr>
+        <p:txBody>
+          <a:bodyPr wrap="square" lIns="0" tIns="0" rIns="0" bIns="0" rtlCol="0" anchor="t">
+            <a:normAutofit/>
+          </a:bodyPr>
+          <a:lstStyle/>
+          <a:p>
+            <a:pPr marL="0" indent="0" algn="l">
+              <a:lnSpc>
+                <a:spcPts val="2100"/>
+              </a:lnSpc>
+              <a:buNone/>
+            </a:pPr>
+            <a:r>
+              <a:rPr lang="en-US" sz="1500" dirty="0">
+                <a:solidFill>
+                  <a:srgbClr val="8F8A82"/>
+                </a:solidFill>
+                <a:latin typeface="Nunito Sans" pitchFamily="34" charset="0"/>
+                <a:ea typeface="Nunito Sans" pitchFamily="34" charset="-122"/>
+                <a:cs typeface="Nunito Sans" pitchFamily="34" charset="-120"/>
+              </a:rPr>
+              <a:t>[What you were into at 12: games, Lego, taking the family computer apart, sports strategy…]</a:t>
+            </a:r>
+          </a:p>
+        </p:txBody>
+      </p:sp>
+      <p:sp>
+        <p:nvSpPr>
+          <p:cNvPr id="505" name="Story card 2"/>
+          <p:cNvSpPr/>
+          <p:nvPr/>
+        </p:nvSpPr>
+        <p:spPr>
+          <a:xfrm>
+            <a:off x="4342486" y="2240280"/>
+            <a:ext cx="3264408" cy="2697480"/>
+          </a:xfrm>
+          <a:prstGeom prst="roundRect">
+            <a:avLst>
+              <a:gd name="adj" fmla="val 5000"/>
+            </a:avLst>
+          </a:prstGeom>
+          <a:solidFill>
+            <a:srgbClr val="FFFFFF"/>
+          </a:solidFill>
+          <a:ln w="12700">
+            <a:solidFill>
+              <a:srgbClr val="E4DED5"/>
+            </a:solidFill>
+            <a:prstDash val="solid"/>
+          </a:ln>
+        </p:spPr>
+        <p:txBody>
+          <a:bodyPr/>
+          <a:lstStyle/>
+          <a:p>
+            <a:endParaRPr lang="en-US"/>
+          </a:p>
+        </p:txBody>
+      </p:sp>
+      <p:pic>
+        <p:nvPicPr>
+          <p:cNvPr id="506" name="Story icon 2" descr="Lightbulb"/>
+          <p:cNvPicPr>
+            <a:picLocks noChangeAspect="1"/>
+          </p:cNvPicPr>
+          <p:nvPr/>
+        </p:nvPicPr>
+        <p:blipFill>
+          <a:blip r:embed="rId10"/>
+          <a:stretch>
+            <a:fillRect/>
+          </a:stretch>
+        </p:blipFill>
+        <p:spPr>
+          <a:xfrm>
+            <a:off x="4616806" y="2514600"/>
+            <a:ext cx="457200" cy="457200"/>
+          </a:xfrm>
+          <a:prstGeom prst="rect">
+            <a:avLst/>
+          </a:prstGeom>
+        </p:spPr>
+      </p:pic>
+      <p:sp>
+        <p:nvSpPr>
+          <p:cNvPr id="507" name="Story head 2"/>
+          <p:cNvSpPr txBox="1"/>
+          <p:nvPr/>
+        </p:nvSpPr>
+        <p:spPr>
+          <a:xfrm>
+            <a:off x="4616806" y="3136392"/>
+            <a:ext cx="2715768" cy="320040"/>
+          </a:xfrm>
+          <a:prstGeom prst="rect">
+            <a:avLst/>
+          </a:prstGeom>
+          <a:noFill/>
+          <a:ln/>
+        </p:spPr>
+        <p:txBody>
+          <a:bodyPr wrap="square" lIns="0" tIns="0" rIns="0" bIns="0" rtlCol="0" anchor="t">
+            <a:normAutofit/>
+          </a:bodyPr>
+          <a:lstStyle/>
+          <a:p>
+            <a:pPr marL="0" indent="0" algn="l">
+              <a:buNone/>
+            </a:pPr>
+            <a:r>
+              <a:rPr lang="en-US" sz="1600" b="1" spc="100" dirty="0">
+                <a:solidFill>
+                  <a:srgbClr val="D21F2B"/>
+                </a:solidFill>
+                <a:latin typeface="Nunito Sans" pitchFamily="34" charset="0"/>
+                <a:ea typeface="Nunito Sans" pitchFamily="34" charset="-122"/>
+                <a:cs typeface="Nunito Sans" pitchFamily="34" charset="-120"/>
+              </a:rPr>
+              <a:t>THE MOMENT IT CLICKED</a:t>
+            </a:r>
+          </a:p>
+        </p:txBody>
+      </p:sp>
+      <p:sp>
+        <p:nvSpPr>
+          <p:cNvPr id="508" name="Story body 2"/>
+          <p:cNvSpPr txBox="1"/>
+          <p:nvPr/>
+        </p:nvSpPr>
+        <p:spPr>
+          <a:xfrm>
+            <a:off x="4616806" y="3538728"/>
+            <a:ext cx="2715768" cy="1280160"/>
+          </a:xfrm>
+          <a:prstGeom prst="rect">
+            <a:avLst/>
+          </a:prstGeom>
+          <a:noFill/>
+          <a:ln/>
+        </p:spPr>
+        <p:txBody>
+          <a:bodyPr wrap="square" lIns="0" tIns="0" rIns="0" bIns="0" rtlCol="0" anchor="t">
+            <a:normAutofit/>
+          </a:bodyPr>
+          <a:lstStyle/>
+          <a:p>
+            <a:pPr marL="0" indent="0" algn="l">
+              <a:lnSpc>
+                <a:spcPts val="2100"/>
+              </a:lnSpc>
+              <a:buNone/>
+            </a:pPr>
+            <a:r>
+              <a:rPr lang="en-US" sz="1500" dirty="0">
+                <a:solidFill>
+                  <a:srgbClr val="8F8A82"/>
+                </a:solidFill>
+                <a:latin typeface="Nunito Sans" pitchFamily="34" charset="0"/>
+                <a:ea typeface="Nunito Sans" pitchFamily="34" charset="-122"/>
+                <a:cs typeface="Nunito Sans" pitchFamily="34" charset="-120"/>
+              </a:rPr>
+              <a:t>[The first thing you built, fixed, or figured out, and could not stop thinking about]</a:t>
+            </a:r>
+          </a:p>
+        </p:txBody>
+      </p:sp>
+      <p:sp>
+        <p:nvSpPr>
+          <p:cNvPr id="509" name="Story card 3"/>
+          <p:cNvSpPr/>
+          <p:nvPr/>
+        </p:nvSpPr>
+        <p:spPr>
+          <a:xfrm>
+            <a:off x="7872070" y="2240280"/>
+            <a:ext cx="3264408" cy="2697480"/>
+          </a:xfrm>
+          <a:prstGeom prst="roundRect">
+            <a:avLst>
+              <a:gd name="adj" fmla="val 5000"/>
+            </a:avLst>
+          </a:prstGeom>
+          <a:solidFill>
+            <a:srgbClr val="FFFFFF"/>
+          </a:solidFill>
+          <a:ln w="12700">
+            <a:solidFill>
+              <a:srgbClr val="E4DED5"/>
+            </a:solidFill>
+            <a:prstDash val="solid"/>
+          </a:ln>
+        </p:spPr>
+        <p:txBody>
+          <a:bodyPr/>
+          <a:lstStyle/>
+          <a:p>
+            <a:endParaRPr lang="en-US"/>
+          </a:p>
+        </p:txBody>
+      </p:sp>
+      <p:pic>
+        <p:nvPicPr>
+          <p:cNvPr id="510" name="Story icon 3" descr="GraduationCap"/>
+          <p:cNvPicPr>
+            <a:picLocks noChangeAspect="1"/>
+          </p:cNvPicPr>
+          <p:nvPr/>
+        </p:nvPicPr>
+        <p:blipFill>
+          <a:blip r:embed="rId11"/>
+          <a:stretch>
+            <a:fillRect/>
+          </a:stretch>
+        </p:blipFill>
+        <p:spPr>
+          <a:xfrm>
+            <a:off x="8146390" y="2514600"/>
+            <a:ext cx="457200" cy="457200"/>
+          </a:xfrm>
+          <a:prstGeom prst="rect">
+            <a:avLst/>
+          </a:prstGeom>
+        </p:spPr>
+      </p:pic>
+      <p:sp>
+        <p:nvSpPr>
+          <p:cNvPr id="511" name="Story head 3"/>
+          <p:cNvSpPr txBox="1"/>
+          <p:nvPr/>
+        </p:nvSpPr>
+        <p:spPr>
+          <a:xfrm>
+            <a:off x="8146390" y="3136392"/>
+            <a:ext cx="2715768" cy="320040"/>
+          </a:xfrm>
+          <a:prstGeom prst="rect">
+            <a:avLst/>
+          </a:prstGeom>
+          <a:noFill/>
+          <a:ln/>
+        </p:spPr>
+        <p:txBody>
+          <a:bodyPr wrap="square" lIns="0" tIns="0" rIns="0" bIns="0" rtlCol="0" anchor="t">
+            <a:normAutofit/>
+          </a:bodyPr>
+          <a:lstStyle/>
+          <a:p>
+            <a:pPr marL="0" indent="0" algn="l">
+              <a:buNone/>
+            </a:pPr>
+            <a:r>
+              <a:rPr lang="en-US" sz="1600" b="1" spc="100" dirty="0">
+                <a:solidFill>
+                  <a:srgbClr val="D21F2B"/>
+                </a:solidFill>
+                <a:latin typeface="Nunito Sans" pitchFamily="34" charset="0"/>
+                <a:ea typeface="Nunito Sans" pitchFamily="34" charset="-122"/>
+                <a:cs typeface="Nunito Sans" pitchFamily="34" charset="-120"/>
+              </a:rPr>
+              <a:t>FIRST STEP INTO TECH</a:t>
+            </a:r>
+          </a:p>
+        </p:txBody>
+      </p:sp>
+      <p:sp>
+        <p:nvSpPr>
+          <p:cNvPr id="512" name="Story body 3"/>
+          <p:cNvSpPr txBox="1"/>
+          <p:nvPr/>
+        </p:nvSpPr>
+        <p:spPr>
+          <a:xfrm>
+            <a:off x="8146390" y="3538728"/>
+            <a:ext cx="2715768" cy="1280160"/>
+          </a:xfrm>
+          <a:prstGeom prst="rect">
+            <a:avLst/>
+          </a:prstGeom>
+          <a:noFill/>
+          <a:ln/>
+        </p:spPr>
+        <p:txBody>
+          <a:bodyPr wrap="square" lIns="0" tIns="0" rIns="0" bIns="0" rtlCol="0" anchor="t">
+            <a:normAutofit/>
+          </a:bodyPr>
+          <a:lstStyle/>
+          <a:p>
+            <a:pPr marL="0" indent="0" algn="l">
+              <a:lnSpc>
+                <a:spcPts val="2100"/>
+              </a:lnSpc>
+              <a:buNone/>
+            </a:pPr>
+            <a:r>
+              <a:rPr lang="en-US" sz="1500" dirty="0">
+                <a:solidFill>
+                  <a:srgbClr val="8F8A82"/>
+                </a:solidFill>
+                <a:latin typeface="Nunito Sans" pitchFamily="34" charset="0"/>
+                <a:ea typeface="Nunito Sans" pitchFamily="34" charset="-122"/>
+                <a:cs typeface="Nunito Sans" pitchFamily="34" charset="-120"/>
+              </a:rPr>
+              <a:t>[Your first class, job, or mentor that opened the door]</a:t>
+            </a:r>
+          </a:p>
+        </p:txBody>
+      </p:sp>
+      <p:sp>
+        <p:nvSpPr>
+          <p:cNvPr id="513" name="Story today"/>
+          <p:cNvSpPr/>
+          <p:nvPr/>
+        </p:nvSpPr>
+        <p:spPr>
+          <a:xfrm>
+            <a:off x="812902" y="5166360"/>
+            <a:ext cx="10565892" cy="777240"/>
+          </a:xfrm>
+          <a:prstGeom prst="roundRect">
+            <a:avLst>
+              <a:gd name="adj" fmla="val 7576"/>
+            </a:avLst>
+          </a:prstGeom>
+          <a:solidFill>
+            <a:srgbClr val="161616"/>
+          </a:solidFill>
+          <a:ln/>
+        </p:spPr>
+        <p:txBody>
+          <a:bodyPr/>
+          <a:lstStyle/>
+          <a:p>
+            <a:endParaRPr lang="en-US"/>
+          </a:p>
+        </p:txBody>
+      </p:sp>
+      <p:sp>
+        <p:nvSpPr>
+          <p:cNvPr id="514" name="Story today text"/>
+          <p:cNvSpPr txBox="1"/>
+          <p:nvPr/>
+        </p:nvSpPr>
+        <p:spPr>
+          <a:xfrm>
+            <a:off x="1097280" y="5166360"/>
+            <a:ext cx="9966960" cy="777240"/>
+          </a:xfrm>
+          <a:prstGeom prst="rect">
+            <a:avLst/>
+          </a:prstGeom>
+          <a:noFill/>
+          <a:ln/>
+        </p:spPr>
+        <p:txBody>
+          <a:bodyPr wrap="square" lIns="0" tIns="0" rIns="0" bIns="0" rtlCol="0" anchor="ctr">
+            <a:normAutofit/>
+          </a:bodyPr>
+          <a:lstStyle/>
+          <a:p>
+            <a:pPr marL="0" indent="0" algn="l">
+              <a:buNone/>
+            </a:pPr>
+            <a:r>
+              <a:rPr lang="en-US" sz="1600" b="1" spc="100" dirty="0">
+                <a:solidFill>
+                  <a:srgbClr val="D21F2B"/>
+                </a:solidFill>
+                <a:latin typeface="Nunito Sans" pitchFamily="34" charset="0"/>
+                <a:ea typeface="Nunito Sans" pitchFamily="34" charset="-122"/>
+                <a:cs typeface="Nunito Sans" pitchFamily="34" charset="-120"/>
+              </a:rPr>
+              <a:t>TODAY   </a:t>
+            </a:r>
+            <a:r>
+              <a:rPr lang="en-US" sz="1800" b="1" dirty="0">
+                <a:solidFill>
+                  <a:srgbClr val="F6F3EE"/>
+                </a:solidFill>
+                <a:latin typeface="Nunito Sans" pitchFamily="34" charset="0"/>
+                <a:ea typeface="Nunito Sans" pitchFamily="34" charset="-122"/>
+                <a:cs typeface="Nunito Sans" pitchFamily="34" charset="-120"/>
+              </a:rPr>
+              <a:t>Cloud &amp; AI Architect. I draw the plans for apps, data, and AI that live in the cloud.</a:t>
+            </a:r>
+          </a:p>
+        </p:txBody>
+      </p:sp>
+    </p:spTree>
+  </p:cSld>
+  <p:clrMapOvr>
+    <a:masterClrMapping/>
+  </p:clrMapOvr>
+</p:sld>
+</file>
+
 <file path=ppt/slides/slide2.xml><?xml version="1.0" encoding="utf-8"?>
 <p:sld xmlns:a="http://schemas.openxmlformats.org/drawingml/2006/main" xmlns:r="http://schemas.openxmlformats.org/officeDocument/2006/relationships" xmlns:p="http://schemas.openxmlformats.org/presentationml/2006/main">
   <p:cSld name="Slide 2">
@@ -9580,6 +10428,606 @@
                 <a:cs typeface="Nunito Sans" pitchFamily="34" charset="-120"/>
               </a:rPr>
               <a:t>Look around.  How many Badgers are still standing?</a:t>
+            </a:r>
+          </a:p>
+        </p:txBody>
+      </p:sp>
+    </p:spTree>
+  </p:cSld>
+  <p:clrMapOvr>
+    <a:masterClrMapping/>
+  </p:clrMapOvr>
+</p:sld>
+</file>
+
+<file path=ppt/slides/slide20.xml><?xml version="1.0" encoding="utf-8"?>
+<p:sld xmlns:a="http://schemas.openxmlformats.org/drawingml/2006/main" xmlns:r="http://schemas.openxmlformats.org/officeDocument/2006/relationships" xmlns:p="http://schemas.openxmlformats.org/presentationml/2006/main">
+  <p:cSld name="Slide 2">
+    <p:bg>
+      <p:bgPr>
+        <a:solidFill>
+          <a:srgbClr val="F6F3EE"/>
+        </a:solidFill>
+        <a:effectLst/>
+      </p:bgPr>
+    </p:bg>
+    <p:spTree>
+      <p:nvGrpSpPr>
+        <p:cNvPr id="1" name=""/>
+        <p:cNvGrpSpPr/>
+        <p:nvPr/>
+      </p:nvGrpSpPr>
+      <p:grpSpPr>
+        <a:xfrm>
+          <a:off x="0" y="0"/>
+          <a:ext cx="0" cy="0"/>
+          <a:chOff x="0" y="0"/>
+          <a:chExt cx="0" cy="0"/>
+        </a:xfrm>
+      </p:grpSpPr>
+      <p:sp>
+        <p:nvSpPr>
+          <p:cNvPr id="2" name="Text 0"/>
+          <p:cNvSpPr/>
+          <p:nvPr/>
+        </p:nvSpPr>
+        <p:spPr>
+          <a:xfrm>
+            <a:off x="812800" y="812800"/>
+            <a:ext cx="10883392" cy="274241"/>
+          </a:xfrm>
+          <a:prstGeom prst="rect">
+            <a:avLst/>
+          </a:prstGeom>
+          <a:noFill/>
+          <a:ln/>
+        </p:spPr>
+        <p:txBody>
+          <a:bodyPr wrap="square" lIns="0" tIns="0" rIns="0" bIns="0" rtlCol="0" anchor="t">
+            <a:normAutofit/>
+          </a:bodyPr>
+          <a:lstStyle/>
+          <a:p>
+            <a:pPr marL="0" indent="0" algn="l">
+              <a:lnSpc>
+                <a:spcPts val="1960"/>
+              </a:lnSpc>
+              <a:buNone/>
+            </a:pPr>
+            <a:r>
+              <a:rPr lang="en-US" sz="1400" b="1" kern="0" spc="200" dirty="0">
+                <a:solidFill>
+                  <a:srgbClr val="D21F2B"/>
+                </a:solidFill>
+                <a:latin typeface="Nunito Sans" pitchFamily="34" charset="0"/>
+                <a:ea typeface="Nunito Sans" pitchFamily="34" charset="-122"/>
+                <a:cs typeface="Nunito Sans" pitchFamily="34" charset="-120"/>
+              </a:rPr>
+              <a:t>COOL CAREERS YOU'VE NEVER HEARD OF · CLOUD &amp; AI ARCHITECT</a:t>
+            </a:r>
+            <a:endParaRPr lang="en-US" sz="1400" dirty="0"/>
+          </a:p>
+        </p:txBody>
+      </p:sp>
+      <p:sp>
+        <p:nvSpPr>
+          <p:cNvPr id="3" name="Text 1"/>
+          <p:cNvSpPr>
+            <a:spLocks noGrp="1"/>
+          </p:cNvSpPr>
+          <p:nvPr>
+            <p:ph type="title"/>
+          </p:nvPr>
+        </p:nvSpPr>
+        <p:spPr>
+          <a:xfrm>
+            <a:off x="812800" y="1366441"/>
+            <a:ext cx="10883392" cy="1325880"/>
+          </a:xfrm>
+          <a:prstGeom prst="rect">
+            <a:avLst/>
+          </a:prstGeom>
+          <a:noFill/>
+          <a:ln/>
+        </p:spPr>
+        <p:txBody>
+          <a:bodyPr wrap="square" lIns="0" tIns="0" rIns="0" bIns="0" rtlCol="0" anchor="t">
+            <a:normAutofit/>
+          </a:bodyPr>
+          <a:lstStyle/>
+          <a:p>
+            <a:pPr marL="0" indent="0" algn="l">
+              <a:lnSpc>
+                <a:spcPts val="5040"/>
+              </a:lnSpc>
+              <a:buNone/>
+            </a:pPr>
+            <a:r>
+              <a:rPr lang="en-US" sz="4800" b="1" i="0" dirty="0">
+                <a:solidFill>
+                  <a:srgbClr val="161616"/>
+                </a:solidFill>
+                <a:latin typeface="Oswald" pitchFamily="34" charset="0"/>
+                <a:ea typeface="Oswald" pitchFamily="34" charset="-122"/>
+                <a:cs typeface="Oswald" pitchFamily="34" charset="-120"/>
+              </a:rPr>
+              <a:t>A JOB THAT DID NOT EXIST WHEN YOUR TEACHERS WERE YOUR AGE</a:t>
+            </a:r>
+            <a:endParaRPr lang="en-US" sz="4800" dirty="0"/>
+          </a:p>
+        </p:txBody>
+      </p:sp>
+      <p:sp>
+        <p:nvSpPr>
+          <p:cNvPr id="22" name="Text 14"/>
+          <p:cNvSpPr/>
+          <p:nvPr/>
+        </p:nvSpPr>
+        <p:spPr>
+          <a:xfrm>
+            <a:off x="812800" y="6238280"/>
+            <a:ext cx="10883392" cy="238720"/>
+          </a:xfrm>
+          <a:prstGeom prst="rect">
+            <a:avLst/>
+          </a:prstGeom>
+          <a:noFill/>
+          <a:ln/>
+        </p:spPr>
+        <p:txBody>
+          <a:bodyPr wrap="square" lIns="0" tIns="0" rIns="0" bIns="0" rtlCol="0" anchor="t">
+            <a:normAutofit/>
+          </a:bodyPr>
+          <a:lstStyle/>
+          <a:p>
+            <a:pPr marL="0" indent="0" algn="l">
+              <a:lnSpc>
+                <a:spcPts val="1680"/>
+              </a:lnSpc>
+              <a:buNone/>
+            </a:pPr>
+            <a:r>
+              <a:rPr lang="en-US" sz="1200" dirty="0">
+                <a:solidFill>
+                  <a:srgbClr val="8F8A82"/>
+                </a:solidFill>
+                <a:latin typeface="Nunito Sans" pitchFamily="34" charset="0"/>
+                <a:ea typeface="Nunito Sans" pitchFamily="34" charset="-122"/>
+                <a:cs typeface="Nunito Sans" pitchFamily="34" charset="-120"/>
+              </a:rPr>
+              <a:t>Ed Willkie Badgers · Career Day</a:t>
+            </a:r>
+            <a:endParaRPr lang="en-US" sz="1200" dirty="0"/>
+          </a:p>
+        </p:txBody>
+      </p:sp>
+      <p:sp>
+        <p:nvSpPr>
+          <p:cNvPr id="515" name="Job card 1"/>
+          <p:cNvSpPr/>
+          <p:nvPr/>
+        </p:nvSpPr>
+        <p:spPr>
+          <a:xfrm>
+            <a:off x="812902" y="2788920"/>
+            <a:ext cx="3264408" cy="2148840"/>
+          </a:xfrm>
+          <a:prstGeom prst="roundRect">
+            <a:avLst>
+              <a:gd name="adj" fmla="val 5000"/>
+            </a:avLst>
+          </a:prstGeom>
+          <a:solidFill>
+            <a:srgbClr val="FFFFFF"/>
+          </a:solidFill>
+          <a:ln w="12700">
+            <a:solidFill>
+              <a:srgbClr val="E4DED5"/>
+            </a:solidFill>
+            <a:prstDash val="solid"/>
+          </a:ln>
+        </p:spPr>
+        <p:txBody>
+          <a:bodyPr/>
+          <a:lstStyle/>
+          <a:p>
+            <a:endParaRPr lang="en-US"/>
+          </a:p>
+        </p:txBody>
+      </p:sp>
+      <p:sp>
+        <p:nvSpPr>
+          <p:cNvPr id="516" name="Job year 1"/>
+          <p:cNvSpPr txBox="1"/>
+          <p:nvPr/>
+        </p:nvSpPr>
+        <p:spPr>
+          <a:xfrm>
+            <a:off x="1087222" y="3044952"/>
+            <a:ext cx="2715768" cy="640080"/>
+          </a:xfrm>
+          <a:prstGeom prst="rect">
+            <a:avLst/>
+          </a:prstGeom>
+          <a:noFill/>
+          <a:ln/>
+        </p:spPr>
+        <p:txBody>
+          <a:bodyPr wrap="square" lIns="0" tIns="0" rIns="0" bIns="0" rtlCol="0" anchor="t">
+            <a:normAutofit/>
+          </a:bodyPr>
+          <a:lstStyle/>
+          <a:p>
+            <a:pPr marL="0" indent="0" algn="l">
+              <a:buNone/>
+            </a:pPr>
+            <a:r>
+              <a:rPr lang="en-US" sz="3600" b="1" dirty="0">
+                <a:solidFill>
+                  <a:srgbClr val="D21F2B"/>
+                </a:solidFill>
+                <a:latin typeface="Oswald" pitchFamily="34" charset="0"/>
+                <a:ea typeface="Oswald" pitchFamily="34" charset="-122"/>
+                <a:cs typeface="Oswald" pitchFamily="34" charset="-120"/>
+              </a:rPr>
+              <a:t>2006</a:t>
+            </a:r>
+          </a:p>
+        </p:txBody>
+      </p:sp>
+      <p:sp>
+        <p:nvSpPr>
+          <p:cNvPr id="517" name="Job body 1"/>
+          <p:cNvSpPr txBox="1"/>
+          <p:nvPr/>
+        </p:nvSpPr>
+        <p:spPr>
+          <a:xfrm>
+            <a:off x="1087222" y="3749040"/>
+            <a:ext cx="2715768" cy="1097280"/>
+          </a:xfrm>
+          <a:prstGeom prst="rect">
+            <a:avLst/>
+          </a:prstGeom>
+          <a:noFill/>
+          <a:ln/>
+        </p:spPr>
+        <p:txBody>
+          <a:bodyPr wrap="square" lIns="0" tIns="0" rIns="0" bIns="0" rtlCol="0" anchor="t">
+            <a:normAutofit/>
+          </a:bodyPr>
+          <a:lstStyle/>
+          <a:p>
+            <a:pPr marL="0" indent="0" algn="l">
+              <a:lnSpc>
+                <a:spcPts val="2100"/>
+              </a:lnSpc>
+              <a:buNone/>
+            </a:pPr>
+            <a:r>
+              <a:rPr lang="en-US" sz="1500" dirty="0">
+                <a:solidFill>
+                  <a:srgbClr val="161616"/>
+                </a:solidFill>
+                <a:latin typeface="Nunito Sans" pitchFamily="34" charset="0"/>
+                <a:ea typeface="Nunito Sans" pitchFamily="34" charset="-122"/>
+                <a:cs typeface="Nunito Sans" pitchFamily="34" charset="-120"/>
+              </a:rPr>
+              <a:t>Amazon opens the first big public cloud. Before that, every company had to buy and run its own computers.</a:t>
+            </a:r>
+          </a:p>
+        </p:txBody>
+      </p:sp>
+      <p:sp>
+        <p:nvSpPr>
+          <p:cNvPr id="518" name="Job card 2"/>
+          <p:cNvSpPr/>
+          <p:nvPr/>
+        </p:nvSpPr>
+        <p:spPr>
+          <a:xfrm>
+            <a:off x="4342486" y="2788920"/>
+            <a:ext cx="3264408" cy="2148840"/>
+          </a:xfrm>
+          <a:prstGeom prst="roundRect">
+            <a:avLst>
+              <a:gd name="adj" fmla="val 5000"/>
+            </a:avLst>
+          </a:prstGeom>
+          <a:solidFill>
+            <a:srgbClr val="FFFFFF"/>
+          </a:solidFill>
+          <a:ln w="12700">
+            <a:solidFill>
+              <a:srgbClr val="E4DED5"/>
+            </a:solidFill>
+            <a:prstDash val="solid"/>
+          </a:ln>
+        </p:spPr>
+        <p:txBody>
+          <a:bodyPr/>
+          <a:lstStyle/>
+          <a:p>
+            <a:endParaRPr lang="en-US"/>
+          </a:p>
+        </p:txBody>
+      </p:sp>
+      <p:sp>
+        <p:nvSpPr>
+          <p:cNvPr id="519" name="Job year 2"/>
+          <p:cNvSpPr txBox="1"/>
+          <p:nvPr/>
+        </p:nvSpPr>
+        <p:spPr>
+          <a:xfrm>
+            <a:off x="4616806" y="3044952"/>
+            <a:ext cx="2715768" cy="640080"/>
+          </a:xfrm>
+          <a:prstGeom prst="rect">
+            <a:avLst/>
+          </a:prstGeom>
+          <a:noFill/>
+          <a:ln/>
+        </p:spPr>
+        <p:txBody>
+          <a:bodyPr wrap="square" lIns="0" tIns="0" rIns="0" bIns="0" rtlCol="0" anchor="t">
+            <a:normAutofit/>
+          </a:bodyPr>
+          <a:lstStyle/>
+          <a:p>
+            <a:pPr marL="0" indent="0" algn="l">
+              <a:buNone/>
+            </a:pPr>
+            <a:r>
+              <a:rPr lang="en-US" sz="3600" b="1" dirty="0">
+                <a:solidFill>
+                  <a:srgbClr val="D21F2B"/>
+                </a:solidFill>
+                <a:latin typeface="Oswald" pitchFamily="34" charset="0"/>
+                <a:ea typeface="Oswald" pitchFamily="34" charset="-122"/>
+                <a:cs typeface="Oswald" pitchFamily="34" charset="-120"/>
+              </a:rPr>
+              <a:t>2008 · 2010</a:t>
+            </a:r>
+          </a:p>
+        </p:txBody>
+      </p:sp>
+      <p:sp>
+        <p:nvSpPr>
+          <p:cNvPr id="520" name="Job body 2"/>
+          <p:cNvSpPr txBox="1"/>
+          <p:nvPr/>
+        </p:nvSpPr>
+        <p:spPr>
+          <a:xfrm>
+            <a:off x="4616806" y="3749040"/>
+            <a:ext cx="2715768" cy="1097280"/>
+          </a:xfrm>
+          <a:prstGeom prst="rect">
+            <a:avLst/>
+          </a:prstGeom>
+          <a:noFill/>
+          <a:ln/>
+        </p:spPr>
+        <p:txBody>
+          <a:bodyPr wrap="square" lIns="0" tIns="0" rIns="0" bIns="0" rtlCol="0" anchor="t">
+            <a:normAutofit/>
+          </a:bodyPr>
+          <a:lstStyle/>
+          <a:p>
+            <a:pPr marL="0" indent="0" algn="l">
+              <a:lnSpc>
+                <a:spcPts val="2100"/>
+              </a:lnSpc>
+              <a:buNone/>
+            </a:pPr>
+            <a:r>
+              <a:rPr lang="en-US" sz="1500" dirty="0">
+                <a:solidFill>
+                  <a:srgbClr val="161616"/>
+                </a:solidFill>
+                <a:latin typeface="Nunito Sans" pitchFamily="34" charset="0"/>
+                <a:ea typeface="Nunito Sans" pitchFamily="34" charset="-122"/>
+                <a:cs typeface="Nunito Sans" pitchFamily="34" charset="-120"/>
+              </a:rPr>
+              <a:t>Google and Microsoft follow. A brand-new question appears: who decides how all of it fits together?</a:t>
+            </a:r>
+          </a:p>
+        </p:txBody>
+      </p:sp>
+      <p:sp>
+        <p:nvSpPr>
+          <p:cNvPr id="521" name="Job card 3"/>
+          <p:cNvSpPr/>
+          <p:nvPr/>
+        </p:nvSpPr>
+        <p:spPr>
+          <a:xfrm>
+            <a:off x="7872070" y="2788920"/>
+            <a:ext cx="3264408" cy="2148840"/>
+          </a:xfrm>
+          <a:prstGeom prst="roundRect">
+            <a:avLst>
+              <a:gd name="adj" fmla="val 5000"/>
+            </a:avLst>
+          </a:prstGeom>
+          <a:solidFill>
+            <a:srgbClr val="FFFFFF"/>
+          </a:solidFill>
+          <a:ln w="12700">
+            <a:solidFill>
+              <a:srgbClr val="E4DED5"/>
+            </a:solidFill>
+            <a:prstDash val="solid"/>
+          </a:ln>
+        </p:spPr>
+        <p:txBody>
+          <a:bodyPr/>
+          <a:lstStyle/>
+          <a:p>
+            <a:endParaRPr lang="en-US"/>
+          </a:p>
+        </p:txBody>
+      </p:sp>
+      <p:sp>
+        <p:nvSpPr>
+          <p:cNvPr id="522" name="Job year 3"/>
+          <p:cNvSpPr txBox="1"/>
+          <p:nvPr/>
+        </p:nvSpPr>
+        <p:spPr>
+          <a:xfrm>
+            <a:off x="8146390" y="3044952"/>
+            <a:ext cx="2715768" cy="640080"/>
+          </a:xfrm>
+          <a:prstGeom prst="rect">
+            <a:avLst/>
+          </a:prstGeom>
+          <a:noFill/>
+          <a:ln/>
+        </p:spPr>
+        <p:txBody>
+          <a:bodyPr wrap="square" lIns="0" tIns="0" rIns="0" bIns="0" rtlCol="0" anchor="t">
+            <a:normAutofit/>
+          </a:bodyPr>
+          <a:lstStyle/>
+          <a:p>
+            <a:pPr marL="0" indent="0" algn="l">
+              <a:buNone/>
+            </a:pPr>
+            <a:r>
+              <a:rPr lang="en-US" sz="3600" b="1" dirty="0">
+                <a:solidFill>
+                  <a:srgbClr val="D21F2B"/>
+                </a:solidFill>
+                <a:latin typeface="Oswald" pitchFamily="34" charset="0"/>
+                <a:ea typeface="Oswald" pitchFamily="34" charset="-122"/>
+                <a:cs typeface="Oswald" pitchFamily="34" charset="-120"/>
+              </a:rPr>
+              <a:t>TODAY</a:t>
+            </a:r>
+          </a:p>
+        </p:txBody>
+      </p:sp>
+      <p:sp>
+        <p:nvSpPr>
+          <p:cNvPr id="523" name="Job body 3"/>
+          <p:cNvSpPr txBox="1"/>
+          <p:nvPr/>
+        </p:nvSpPr>
+        <p:spPr>
+          <a:xfrm>
+            <a:off x="8146390" y="3749040"/>
+            <a:ext cx="2715768" cy="1097280"/>
+          </a:xfrm>
+          <a:prstGeom prst="rect">
+            <a:avLst/>
+          </a:prstGeom>
+          <a:noFill/>
+          <a:ln/>
+        </p:spPr>
+        <p:txBody>
+          <a:bodyPr wrap="square" lIns="0" tIns="0" rIns="0" bIns="0" rtlCol="0" anchor="t">
+            <a:normAutofit/>
+          </a:bodyPr>
+          <a:lstStyle/>
+          <a:p>
+            <a:pPr marL="0" indent="0" algn="l">
+              <a:lnSpc>
+                <a:spcPts val="2100"/>
+              </a:lnSpc>
+              <a:buNone/>
+            </a:pPr>
+            <a:r>
+              <a:rPr lang="en-US" sz="1500" dirty="0">
+                <a:solidFill>
+                  <a:srgbClr val="161616"/>
+                </a:solidFill>
+                <a:latin typeface="Nunito Sans" pitchFamily="34" charset="0"/>
+                <a:ea typeface="Nunito Sans" pitchFamily="34" charset="-122"/>
+                <a:cs typeface="Nunito Sans" pitchFamily="34" charset="-120"/>
+              </a:rPr>
+              <a:t>Games, streaming, maps, and chatbots all run in those buildings. Somebody has to draw the plan.</a:t>
+            </a:r>
+          </a:p>
+        </p:txBody>
+      </p:sp>
+      <p:sp>
+        <p:nvSpPr>
+          <p:cNvPr id="524" name="Job punchline"/>
+          <p:cNvSpPr/>
+          <p:nvPr/>
+        </p:nvSpPr>
+        <p:spPr>
+          <a:xfrm>
+            <a:off x="812902" y="5166360"/>
+            <a:ext cx="10565892" cy="777240"/>
+          </a:xfrm>
+          <a:prstGeom prst="roundRect">
+            <a:avLst>
+              <a:gd name="adj" fmla="val 7576"/>
+            </a:avLst>
+          </a:prstGeom>
+          <a:solidFill>
+            <a:srgbClr val="161616"/>
+          </a:solidFill>
+          <a:ln/>
+        </p:spPr>
+        <p:txBody>
+          <a:bodyPr/>
+          <a:lstStyle/>
+          <a:p>
+            <a:endParaRPr lang="en-US"/>
+          </a:p>
+        </p:txBody>
+      </p:sp>
+      <p:sp>
+        <p:nvSpPr>
+          <p:cNvPr id="525" name="Job punchline text"/>
+          <p:cNvSpPr txBox="1"/>
+          <p:nvPr/>
+        </p:nvSpPr>
+        <p:spPr>
+          <a:xfrm>
+            <a:off x="1097280" y="5166360"/>
+            <a:ext cx="9966960" cy="777240"/>
+          </a:xfrm>
+          <a:prstGeom prst="rect">
+            <a:avLst/>
+          </a:prstGeom>
+          <a:noFill/>
+          <a:ln/>
+        </p:spPr>
+        <p:txBody>
+          <a:bodyPr wrap="square" lIns="0" tIns="0" rIns="0" bIns="0" rtlCol="0" anchor="ctr">
+            <a:normAutofit/>
+          </a:bodyPr>
+          <a:lstStyle/>
+          <a:p>
+            <a:pPr marL="0" indent="0" algn="l">
+              <a:buNone/>
+            </a:pPr>
+            <a:r>
+              <a:rPr lang="en-US" sz="1700" b="1" dirty="0">
+                <a:solidFill>
+                  <a:srgbClr val="F6F3EE"/>
+                </a:solidFill>
+                <a:latin typeface="Nunito Sans" pitchFamily="34" charset="0"/>
+                <a:ea typeface="Nunito Sans" pitchFamily="34" charset="-122"/>
+                <a:cs typeface="Nunito Sans" pitchFamily="34" charset="-120"/>
+              </a:rPr>
+              <a:t>THAT SOMEBODY IS A CLOUD ARCHITECT.   </a:t>
+            </a:r>
+            <a:r>
+              <a:rPr lang="en-US" sz="1700" dirty="0">
+                <a:solidFill>
+                  <a:srgbClr val="8F8A82"/>
+                </a:solidFill>
+                <a:latin typeface="Nunito Sans" pitchFamily="34" charset="0"/>
+                <a:ea typeface="Nunito Sans" pitchFamily="34" charset="-122"/>
+                <a:cs typeface="Nunito Sans" pitchFamily="34" charset="-120"/>
+              </a:rPr>
+              <a:t>You never see our work. If I do my job right, the app just works.</a:t>
             </a:r>
           </a:p>
         </p:txBody>
@@ -13445,7 +14893,7 @@
                 <a:ea typeface="Nunito Sans" pitchFamily="34" charset="-122"/>
                 <a:cs typeface="Nunito Sans" pitchFamily="34" charset="-120"/>
               </a:rPr>
-              <a:t>ACTIVITY 2 · 3-MINUTE LIVE DEMO · PREDICT FIRST!</a:t>
+              <a:t>ACTIVITY 3 · 3-MINUTE LIVE DEMO · PREDICT FIRST!</a:t>
             </a:r>
             <a:endParaRPr lang="en-US" sz="1400" dirty="0"/>
           </a:p>
